--- a/modulo-2/PF1821-agentes-low-code/produccion/videos/AE2-capsula.pptx
+++ b/modulo-2/PF1821-agentes-low-code/produccion/videos/AE2-capsula.pptx
@@ -18,6 +18,7 @@
     <p:sldId id="263" r:id="rId17"/>
     <p:sldId id="264" r:id="rId18"/>
     <p:sldId id="265" r:id="rId19"/>
+    <p:sldId id="266" r:id="rId20"/>
   </p:sldIdLst>
   <p:sldSz cx="12192000" cy="6858000"/>
   <p:notesSz cx="6858000" cy="9144000"/>
@@ -161,7 +162,7 @@
           <a:p>
             <a:r>
               <a:rPr lang="es-CL" dirty="0"/>
-              <a:t>Te doy la bienvenida a la cápsula 2 del módulo 2: Tu primer workflow. "De la idea al primer workflow que corre solo".</a:t>
+              <a:t>Te doy la bienvenida a la cápsula 2 del módulo 2, Fundamentos de n8n y manipulación de datos: Tu primer workflow. "De la idea al primer workflow que corre solo".</a:t>
             </a:r>
           </a:p>
         </p:txBody>
@@ -220,6 +221,65 @@
           <a:p>
             <a:r>
               <a:rPr lang="es-CL" dirty="0"/>
+              <a:t>Primeros errores. Nodo en rojo es leer el mensaje; nodo sin salida es revisar la entrada.</a:t>
+            </a:r>
+          </a:p>
+        </p:txBody>
+      </p:sp>
+    </p:spTree>
+  </p:cSld>
+  <p:clrMapOvr>
+    <a:masterClrMapping/>
+  </p:clrMapOvr>
+</p:notes>
+</file>
+
+<file path=ppt/notesSlides/notesSlide11.xml><?xml version="1.0" encoding="utf-8"?>
+<p:notes xmlns:a="http://schemas.openxmlformats.org/drawingml/2006/main" xmlns:r="http://schemas.openxmlformats.org/officeDocument/2006/relationships" xmlns:p="http://schemas.openxmlformats.org/presentationml/2006/main">
+  <p:cSld>
+    <p:spTree>
+      <p:nvGrpSpPr>
+        <p:cNvPr id="1" name=""/>
+        <p:cNvGrpSpPr/>
+        <p:nvPr/>
+      </p:nvGrpSpPr>
+      <p:grpSpPr>
+        <a:xfrm>
+          <a:off x="0" y="0"/>
+          <a:ext cx="0" cy="0"/>
+          <a:chOff x="0" y="0"/>
+          <a:chExt cx="0" cy="0"/>
+        </a:xfrm>
+      </p:grpSpPr>
+      <p:sp>
+        <p:nvSpPr>
+          <p:cNvPr id="2" name="Imagen de diapositiva"/>
+          <p:cNvSpPr>
+            <a:spLocks noGrp="1" noRot="1" noChangeAspect="1"/>
+          </p:cNvSpPr>
+          <p:nvPr>
+            <p:ph type="sldImg"/>
+          </p:nvPr>
+        </p:nvSpPr>
+        <p:spPr/>
+      </p:sp>
+      <p:sp>
+        <p:nvSpPr>
+          <p:cNvPr id="3" name="Notas"/>
+          <p:cNvSpPr>
+            <a:spLocks noGrp="1"/>
+          </p:cNvSpPr>
+          <p:nvPr>
+            <p:ph type="body" idx="1"/>
+          </p:nvPr>
+        </p:nvSpPr>
+        <p:spPr/>
+        <p:txBody>
+          <a:bodyPr/>
+          <a:lstStyle/>
+          <a:p>
+            <a:r>
+              <a:rPr lang="es-CL" dirty="0"/>
               <a:t>Tu tarea. Tutorial y actividad 1, parte B: "Pedido a registro".</a:t>
             </a:r>
           </a:p>
@@ -279,7 +339,7 @@
           <a:p>
             <a:r>
               <a:rPr lang="es-CL" dirty="0"/>
-              <a:t>El editor visual. Nodos que se arrastran y se conectan; cada nodo recibe ítems, hace algo y entrega ítems.</a:t>
+              <a:t>Esta cápsula corresponde al aprendizaje esperado 2 del plan formativo: Crear workflows básicos utilizando la interfaz visual de n8n, para automatizar procesos simples según requerimientos definidos. Sus criterios de evaluación son: Utiliza la interfaz visual de n8n para crear workflows básicos. Configura triggers, nodos de procesamiento y acciones de salida. Implementa workflows funcionales con al menos tres nodos conectados.</a:t>
             </a:r>
           </a:p>
         </p:txBody>
@@ -338,7 +398,7 @@
           <a:p>
             <a:r>
               <a:rPr lang="es-CL" dirty="0"/>
-              <a:t>La estructura base. Trigger, luego procesar, luego ejecutar: algo inicia el flujo, los datos se preparan, y se hace la acción final. Con tres nodos ya hay un workflow útil.</a:t>
+              <a:t>Editor visual y espacio de trabajo. Nodos que se arrastran y se conectan; cada nodo recibe ítems, hace algo y entrega ítems. Desde la vista general se navega entre workflows, credenciales y ejecuciones, y cada workflow se abre en su propio canvas.</a:t>
             </a:r>
           </a:p>
         </p:txBody>
@@ -397,7 +457,7 @@
           <a:p>
             <a:r>
               <a:rPr lang="es-CL" dirty="0"/>
-              <a:t>Tipos de trigger. Manual (para probar), formulario de n8n, webhook (otra aplicación avisa), programado (cada viernes 18:00), eventos de aplicaciones.</a:t>
+              <a:t>La estructura base. Trigger, luego procesar, luego ejecutar: algo inicia el flujo, los datos se preparan, y se hace la acción final. Con tres nodos ya hay un workflow útil.</a:t>
             </a:r>
           </a:p>
         </p:txBody>
@@ -456,7 +516,7 @@
           <a:p>
             <a:r>
               <a:rPr lang="es-CL" dirty="0"/>
-              <a:t>Configurar un nodo. Parámetros, credencial si la necesita, y Execute step para probarlo solo.</a:t>
+              <a:t>Tipos de trigger. Manual (para probar), formulario de n8n, webhook (otra aplicación avisa), programado (cada viernes 18:00), eventos de aplicaciones.</a:t>
             </a:r>
           </a:p>
         </p:txBody>
@@ -515,7 +575,7 @@
           <a:p>
             <a:r>
               <a:rPr lang="es-CL" dirty="0"/>
-              <a:t>Mirar los datos. Panel de entrada y de salida en vista tabla, JSON o esquema. Si no lo viste en la salida, no pasó.</a:t>
+              <a:t>Configurar un nodo. Parámetros, credencial si la necesita, y Execute step para probarlo solo.</a:t>
             </a:r>
           </a:p>
         </p:txBody>
@@ -574,7 +634,7 @@
           <a:p>
             <a:r>
               <a:rPr lang="es-CL" dirty="0"/>
-              <a:t>Probar sin repetir. Pin data: fijar los datos de una ejecución para seguir construyendo sin volver a disparar el trigger.</a:t>
+              <a:t>Mirar los datos. Panel de entrada y de salida en vista tabla, JSON o esquema. Si no lo viste en la salida, no pasó.</a:t>
             </a:r>
           </a:p>
         </p:txBody>
@@ -633,7 +693,7 @@
           <a:p>
             <a:r>
               <a:rPr lang="es-CL" dirty="0"/>
-              <a:t>Prueba y producción. URL de prueba (con Test workflow) y URL de producción (con el workflow activo). Activar es lo que lo deja corriendo solo.</a:t>
+              <a:t>Probar sin repetir. Pin data: fijar los datos de una ejecución para seguir construyendo sin volver a disparar el trigger.</a:t>
             </a:r>
           </a:p>
         </p:txBody>
@@ -692,7 +752,7 @@
           <a:p>
             <a:r>
               <a:rPr lang="es-CL" dirty="0"/>
-              <a:t>Primeros errores. Nodo en rojo es leer el mensaje; nodo sin salida es revisar la entrada.</a:t>
+              <a:t>Prueba y producción. URL de prueba (con Test workflow) y URL de producción (con el workflow activo). Activar es lo que lo deja corriendo solo.</a:t>
             </a:r>
           </a:p>
         </p:txBody>
@@ -841,6 +901,39 @@
       </p:sp>
       <p:sp>
         <p:nvSpPr>
+          <p:cNvPr id="7" name="Etiqueta"/>
+          <p:cNvSpPr txBox="1"/>
+          <p:nvPr/>
+        </p:nvSpPr>
+        <p:spPr>
+          <a:xfrm>
+            <a:off x="609600" y="609600"/>
+            <a:ext cx="7315200" cy="533400"/>
+          </a:xfrm>
+          <a:prstGeom prst="rect">
+            <a:avLst/>
+          </a:prstGeom>
+          <a:noFill/>
+        </p:spPr>
+        <p:txBody>
+          <a:bodyPr wrap="square" lIns="0" rIns="0" anchor="b">
+            <a:normAutofit/>
+          </a:bodyPr>
+          <a:lstStyle/>
+          <a:p>
+            <a:r>
+              <a:rPr lang="es-CL" sz="1200" b="1" dirty="0">
+                <a:solidFill>
+                  <a:srgbClr val="9FC3E6"/>
+                </a:solidFill>
+              </a:rPr>
+              <a:t>MÓDULO 2 · FUNDAMENTOS DE N8N Y MANIPULACIÓN DE DATOS</a:t>
+            </a:r>
+          </a:p>
+        </p:txBody>
+      </p:sp>
+      <p:sp>
+        <p:nvSpPr>
           <p:cNvPr id="4" name="Título"/>
           <p:cNvSpPr txBox="1"/>
           <p:nvPr/>
@@ -903,6 +996,16 @@
               <a:t>"De la idea al primer workflow que corre solo".</a:t>
             </a:r>
           </a:p>
+          <a:p>
+            <a:r>
+              <a:rPr lang="es-CL" sz="2200" dirty="0">
+                <a:solidFill>
+                  <a:srgbClr val="E5E7EB"/>
+                </a:solidFill>
+              </a:rPr>
+              <a:t>Contenido del plan: 2. CREACIÓN DE WORKFLOWS EN LA INTERFAZ DE USUARIO DE N8N</a:t>
+            </a:r>
+          </a:p>
         </p:txBody>
       </p:sp>
       <p:sp>
@@ -933,7 +1036,7 @@
                   <a:srgbClr val="CBD5E1"/>
                 </a:solidFill>
               </a:rPr>
-              <a:t>PF1821 · Módulo 2 · Cápsula 2 · AE2</a:t>
+              <a:t>PF1821 · Módulo 2 · Cápsula 2 · Aprendizaje esperado 2</a:t>
             </a:r>
           </a:p>
         </p:txBody>
@@ -987,14 +1090,57 @@
       </p:sp>
       <p:sp>
         <p:nvSpPr>
+          <p:cNvPr id="7" name="Etiqueta"/>
+          <p:cNvSpPr txBox="1"/>
+          <p:nvPr/>
+        </p:nvSpPr>
+        <p:spPr>
+          <a:xfrm>
+            <a:off x="609600" y="228600"/>
+            <a:ext cx="7315200" cy="914400"/>
+          </a:xfrm>
+          <a:prstGeom prst="rect">
+            <a:avLst/>
+          </a:prstGeom>
+          <a:noFill/>
+        </p:spPr>
+        <p:txBody>
+          <a:bodyPr wrap="square" lIns="0" rIns="0" anchor="b">
+            <a:normAutofit/>
+          </a:bodyPr>
+          <a:lstStyle/>
+          <a:p>
+            <a:r>
+              <a:rPr lang="es-CL" sz="1200" b="1" dirty="0">
+                <a:solidFill>
+                  <a:srgbClr val="0E7490"/>
+                </a:solidFill>
+              </a:rPr>
+              <a:t>CONTENIDO DEL PLAN (TEXTUAL)</a:t>
+            </a:r>
+          </a:p>
+          <a:p>
+            <a:r>
+              <a:rPr lang="es-CL" sz="1200" b="1" dirty="0">
+                <a:solidFill>
+                  <a:srgbClr val="0F3D5E"/>
+                </a:solidFill>
+              </a:rPr>
+              <a:t>TESTING Y DEBUGGING INICIAL.</a:t>
+            </a:r>
+          </a:p>
+        </p:txBody>
+      </p:sp>
+      <p:sp>
+        <p:nvSpPr>
           <p:cNvPr id="3" name="Título"/>
           <p:cNvSpPr txBox="1"/>
           <p:nvPr/>
         </p:nvSpPr>
         <p:spPr>
           <a:xfrm>
-            <a:off x="609600" y="381000"/>
-            <a:ext cx="7315200" cy="990600"/>
+            <a:off x="609600" y="1181100"/>
+            <a:ext cx="7315200" cy="685800"/>
           </a:xfrm>
           <a:prstGeom prst="rect">
             <a:avLst/>
@@ -1008,12 +1154,12 @@
           <a:lstStyle/>
           <a:p>
             <a:r>
-              <a:rPr lang="es-CL" sz="3200" b="1" dirty="0">
+              <a:rPr lang="es-CL" sz="2800" b="1" dirty="0">
                 <a:solidFill>
                   <a:srgbClr val="0F3D5E"/>
                 </a:solidFill>
               </a:rPr>
-              <a:t>Tu tarea</a:t>
+              <a:t>Primeros errores</a:t>
             </a:r>
           </a:p>
         </p:txBody>
@@ -1026,7 +1172,7 @@
         </p:nvSpPr>
         <p:spPr>
           <a:xfrm>
-            <a:off x="609600" y="1447800"/>
+            <a:off x="609600" y="1943100"/>
             <a:ext cx="1066800" cy="50800"/>
           </a:xfrm>
           <a:prstGeom prst="rect">
@@ -1048,8 +1194,8 @@
         </p:nvSpPr>
         <p:spPr>
           <a:xfrm>
-            <a:off x="609600" y="1676400"/>
-            <a:ext cx="7315200" cy="4419600"/>
+            <a:off x="609600" y="2095500"/>
+            <a:ext cx="7315200" cy="4000500"/>
           </a:xfrm>
           <a:prstGeom prst="rect">
             <a:avLst/>
@@ -1078,7 +1224,7 @@
                   <a:srgbClr val="1F2937"/>
                 </a:solidFill>
               </a:rPr>
-              <a:t>Tutorial R05 y actividad 1, parte B: "Pedido a registro".</a:t>
+              <a:t>Nodo en rojo = leer el mensaje; nodo sin salida = revisar la entrada.</a:t>
             </a:r>
           </a:p>
         </p:txBody>
@@ -1111,7 +1257,228 @@
                   <a:srgbClr val="6B7280"/>
                 </a:solidFill>
               </a:rPr>
-              <a:t>PF1821 · Módulo 2 · Cápsula 2 · AE2</a:t>
+              <a:t>PF1821 · Módulo 2 · Cápsula 2 · Aprendizaje esperado 2</a:t>
+            </a:r>
+          </a:p>
+        </p:txBody>
+      </p:sp>
+    </p:spTree>
+  </p:cSld>
+  <p:clrMapOvr>
+    <a:masterClrMapping/>
+  </p:clrMapOvr>
+</p:sld>
+</file>
+
+<file path=ppt/slides/slide11.xml><?xml version="1.0" encoding="utf-8"?>
+<p:sld xmlns:a="http://schemas.openxmlformats.org/drawingml/2006/main" xmlns:r="http://schemas.openxmlformats.org/officeDocument/2006/relationships" xmlns:p="http://schemas.openxmlformats.org/presentationml/2006/main">
+  <p:cSld>
+    <p:spTree>
+      <p:nvGrpSpPr>
+        <p:cNvPr id="1" name=""/>
+        <p:cNvGrpSpPr/>
+        <p:nvPr/>
+      </p:nvGrpSpPr>
+      <p:grpSpPr>
+        <a:xfrm>
+          <a:off x="0" y="0"/>
+          <a:ext cx="0" cy="0"/>
+          <a:chOff x="0" y="0"/>
+          <a:chExt cx="0" cy="0"/>
+        </a:xfrm>
+      </p:grpSpPr>
+      <p:sp>
+        <p:nvSpPr>
+          <p:cNvPr id="2" name="Franja 2"/>
+          <p:cNvSpPr/>
+          <p:nvPr/>
+        </p:nvSpPr>
+        <p:spPr>
+          <a:xfrm>
+            <a:off x="0" y="0"/>
+            <a:ext cx="12192000" cy="152400"/>
+          </a:xfrm>
+          <a:prstGeom prst="rect">
+            <a:avLst/>
+          </a:prstGeom>
+          <a:solidFill>
+            <a:srgbClr val="0E7490"/>
+          </a:solidFill>
+          <a:ln>
+            <a:noFill/>
+          </a:ln>
+        </p:spPr>
+      </p:sp>
+      <p:sp>
+        <p:nvSpPr>
+          <p:cNvPr id="7" name="Etiqueta"/>
+          <p:cNvSpPr txBox="1"/>
+          <p:nvPr/>
+        </p:nvSpPr>
+        <p:spPr>
+          <a:xfrm>
+            <a:off x="609600" y="228600"/>
+            <a:ext cx="7315200" cy="914400"/>
+          </a:xfrm>
+          <a:prstGeom prst="rect">
+            <a:avLst/>
+          </a:prstGeom>
+          <a:noFill/>
+        </p:spPr>
+        <p:txBody>
+          <a:bodyPr wrap="square" lIns="0" rIns="0" anchor="b">
+            <a:normAutofit/>
+          </a:bodyPr>
+          <a:lstStyle/>
+          <a:p>
+            <a:r>
+              <a:rPr lang="es-CL" sz="1200" b="1" dirty="0">
+                <a:solidFill>
+                  <a:srgbClr val="0E7490"/>
+                </a:solidFill>
+              </a:rPr>
+              <a:t>CONTENIDO DEL PLAN (TEXTUAL)</a:t>
+            </a:r>
+          </a:p>
+          <a:p>
+            <a:r>
+              <a:rPr lang="es-CL" sz="1200" b="1" dirty="0">
+                <a:solidFill>
+                  <a:srgbClr val="0F3D5E"/>
+                </a:solidFill>
+              </a:rPr>
+              <a:t>PRIMEROS WORKFLOWS.</a:t>
+            </a:r>
+          </a:p>
+        </p:txBody>
+      </p:sp>
+      <p:sp>
+        <p:nvSpPr>
+          <p:cNvPr id="3" name="Título"/>
+          <p:cNvSpPr txBox="1"/>
+          <p:nvPr/>
+        </p:nvSpPr>
+        <p:spPr>
+          <a:xfrm>
+            <a:off x="609600" y="1181100"/>
+            <a:ext cx="7315200" cy="685800"/>
+          </a:xfrm>
+          <a:prstGeom prst="rect">
+            <a:avLst/>
+          </a:prstGeom>
+          <a:noFill/>
+        </p:spPr>
+        <p:txBody>
+          <a:bodyPr wrap="square" lIns="0" rIns="0" anchor="b">
+            <a:normAutofit/>
+          </a:bodyPr>
+          <a:lstStyle/>
+          <a:p>
+            <a:r>
+              <a:rPr lang="es-CL" sz="2800" b="1" dirty="0">
+                <a:solidFill>
+                  <a:srgbClr val="0F3D5E"/>
+                </a:solidFill>
+              </a:rPr>
+              <a:t>Tu tarea</a:t>
+            </a:r>
+          </a:p>
+        </p:txBody>
+      </p:sp>
+      <p:sp>
+        <p:nvSpPr>
+          <p:cNvPr id="4" name="Franja 4"/>
+          <p:cNvSpPr/>
+          <p:nvPr/>
+        </p:nvSpPr>
+        <p:spPr>
+          <a:xfrm>
+            <a:off x="609600" y="1943100"/>
+            <a:ext cx="1066800" cy="50800"/>
+          </a:xfrm>
+          <a:prstGeom prst="rect">
+            <a:avLst/>
+          </a:prstGeom>
+          <a:solidFill>
+            <a:srgbClr val="F59E0B"/>
+          </a:solidFill>
+          <a:ln>
+            <a:noFill/>
+          </a:ln>
+        </p:spPr>
+      </p:sp>
+      <p:sp>
+        <p:nvSpPr>
+          <p:cNvPr id="5" name="Contenido"/>
+          <p:cNvSpPr txBox="1"/>
+          <p:nvPr/>
+        </p:nvSpPr>
+        <p:spPr>
+          <a:xfrm>
+            <a:off x="609600" y="2095500"/>
+            <a:ext cx="7315200" cy="4000500"/>
+          </a:xfrm>
+          <a:prstGeom prst="rect">
+            <a:avLst/>
+          </a:prstGeom>
+          <a:noFill/>
+        </p:spPr>
+        <p:txBody>
+          <a:bodyPr wrap="square" lIns="0" rIns="0" anchor="t">
+            <a:normAutofit/>
+          </a:bodyPr>
+          <a:lstStyle/>
+          <a:p>
+            <a:pPr marL="342900" indent="-342900">
+              <a:spcBef>
+                <a:spcPts val="900"/>
+              </a:spcBef>
+              <a:buClr>
+                <a:srgbClr val="0E7490"/>
+              </a:buClr>
+              <a:buFont typeface="Arial"/>
+              <a:buChar char="•"/>
+            </a:pPr>
+            <a:r>
+              <a:rPr lang="es-CL" sz="2400" dirty="0">
+                <a:solidFill>
+                  <a:srgbClr val="1F2937"/>
+                </a:solidFill>
+              </a:rPr>
+              <a:t>Tutorial R05 y actividad 1, parte B: "Pedido a registro".</a:t>
+            </a:r>
+          </a:p>
+        </p:txBody>
+      </p:sp>
+      <p:sp>
+        <p:nvSpPr>
+          <p:cNvPr id="6" name="Pie"/>
+          <p:cNvSpPr txBox="1"/>
+          <p:nvPr/>
+        </p:nvSpPr>
+        <p:spPr>
+          <a:xfrm>
+            <a:off x="609600" y="6248400"/>
+            <a:ext cx="7315200" cy="381000"/>
+          </a:xfrm>
+          <a:prstGeom prst="rect">
+            <a:avLst/>
+          </a:prstGeom>
+          <a:noFill/>
+        </p:spPr>
+        <p:txBody>
+          <a:bodyPr wrap="square" lIns="0" rIns="0" anchor="t">
+            <a:normAutofit/>
+          </a:bodyPr>
+          <a:lstStyle/>
+          <a:p>
+            <a:r>
+              <a:rPr lang="es-CL" sz="1200" dirty="0">
+                <a:solidFill>
+                  <a:srgbClr val="6B7280"/>
+                </a:solidFill>
+              </a:rPr>
+              <a:t>PF1821 · Módulo 2 · Cápsula 2 · Aprendizaje esperado 2</a:t>
             </a:r>
           </a:p>
         </p:txBody>
@@ -1165,14 +1532,47 @@
       </p:sp>
       <p:sp>
         <p:nvSpPr>
+          <p:cNvPr id="7" name="Etiqueta"/>
+          <p:cNvSpPr txBox="1"/>
+          <p:nvPr/>
+        </p:nvSpPr>
+        <p:spPr>
+          <a:xfrm>
+            <a:off x="609600" y="228600"/>
+            <a:ext cx="7315200" cy="914400"/>
+          </a:xfrm>
+          <a:prstGeom prst="rect">
+            <a:avLst/>
+          </a:prstGeom>
+          <a:noFill/>
+        </p:spPr>
+        <p:txBody>
+          <a:bodyPr wrap="square" lIns="0" rIns="0" anchor="b">
+            <a:normAutofit/>
+          </a:bodyPr>
+          <a:lstStyle/>
+          <a:p>
+            <a:r>
+              <a:rPr lang="es-CL" sz="1200" b="1" dirty="0">
+                <a:solidFill>
+                  <a:srgbClr val="0E7490"/>
+                </a:solidFill>
+              </a:rPr>
+              <a:t>APRENDIZAJE Y CRITERIOS TEXTUALES DEL PLAN FORMATIVO</a:t>
+            </a:r>
+          </a:p>
+        </p:txBody>
+      </p:sp>
+      <p:sp>
+        <p:nvSpPr>
           <p:cNvPr id="3" name="Título"/>
           <p:cNvSpPr txBox="1"/>
           <p:nvPr/>
         </p:nvSpPr>
         <p:spPr>
           <a:xfrm>
-            <a:off x="609600" y="381000"/>
-            <a:ext cx="7315200" cy="990600"/>
+            <a:off x="609600" y="1181100"/>
+            <a:ext cx="7315200" cy="685800"/>
           </a:xfrm>
           <a:prstGeom prst="rect">
             <a:avLst/>
@@ -1186,12 +1586,12 @@
           <a:lstStyle/>
           <a:p>
             <a:r>
-              <a:rPr lang="es-CL" sz="3200" b="1" dirty="0">
+              <a:rPr lang="es-CL" sz="2800" b="1" dirty="0">
                 <a:solidFill>
                   <a:srgbClr val="0F3D5E"/>
                 </a:solidFill>
               </a:rPr>
-              <a:t>El editor visual</a:t>
+              <a:t>Aprendizaje esperado 2</a:t>
             </a:r>
           </a:p>
         </p:txBody>
@@ -1204,7 +1604,7 @@
         </p:nvSpPr>
         <p:spPr>
           <a:xfrm>
-            <a:off x="609600" y="1447800"/>
+            <a:off x="609600" y="1943100"/>
             <a:ext cx="1066800" cy="50800"/>
           </a:xfrm>
           <a:prstGeom prst="rect">
@@ -1226,8 +1626,8 @@
         </p:nvSpPr>
         <p:spPr>
           <a:xfrm>
-            <a:off x="609600" y="1676400"/>
-            <a:ext cx="7315200" cy="4419600"/>
+            <a:off x="609600" y="2095500"/>
+            <a:ext cx="7315200" cy="4000500"/>
           </a:xfrm>
           <a:prstGeom prst="rect">
             <a:avLst/>
@@ -1251,12 +1651,88 @@
               <a:buChar char="•"/>
             </a:pPr>
             <a:r>
-              <a:rPr lang="es-CL" sz="2400" dirty="0">
+              <a:rPr lang="es-CL" sz="1800" b="1" dirty="0">
                 <a:solidFill>
                   <a:srgbClr val="1F2937"/>
                 </a:solidFill>
               </a:rPr>
-              <a:t>Nodos que se arrastran y se conectan; cada nodo recibe ítems, hace algo y entrega ítems.</a:t>
+              <a:t>CREAR WORKFLOWS BÁSICOS UTILIZANDO LA INTERFAZ VISUAL DE N8N, PARA AUTOMATIZAR PROCESOS SIMPLES SEGÚN REQUERIMIENTOS DEFINIDOS.</a:t>
+            </a:r>
+          </a:p>
+          <a:p>
+            <a:pPr marL="0" indent="0">
+              <a:spcBef>
+                <a:spcPts val="1400"/>
+              </a:spcBef>
+              <a:buNone/>
+            </a:pPr>
+            <a:r>
+              <a:rPr lang="es-CL" sz="1600" b="1" dirty="0">
+                <a:solidFill>
+                  <a:srgbClr val="0E7490"/>
+                </a:solidFill>
+              </a:rPr>
+              <a:t>CRITERIOS DE EVALUACIÓN</a:t>
+            </a:r>
+          </a:p>
+          <a:p>
+            <a:pPr marL="342900" indent="-342900">
+              <a:spcBef>
+                <a:spcPts val="900"/>
+              </a:spcBef>
+              <a:buClr>
+                <a:srgbClr val="0E7490"/>
+              </a:buClr>
+              <a:buFont typeface="Arial"/>
+              <a:buChar char="•"/>
+            </a:pPr>
+            <a:r>
+              <a:rPr lang="es-CL" sz="1800" dirty="0">
+                <a:solidFill>
+                  <a:srgbClr val="1F2937"/>
+                </a:solidFill>
+              </a:rPr>
+              <a:t>2.1 UTILIZA LA INTERFAZ VISUAL DE N8N PARA CREAR WORKFLOWS BÁSICOS.</a:t>
+            </a:r>
+          </a:p>
+          <a:p>
+            <a:pPr marL="342900" indent="-342900">
+              <a:spcBef>
+                <a:spcPts val="900"/>
+              </a:spcBef>
+              <a:buClr>
+                <a:srgbClr val="0E7490"/>
+              </a:buClr>
+              <a:buFont typeface="Arial"/>
+              <a:buChar char="•"/>
+            </a:pPr>
+            <a:r>
+              <a:rPr lang="es-CL" sz="1800" dirty="0">
+                <a:solidFill>
+                  <a:srgbClr val="1F2937"/>
+                </a:solidFill>
+              </a:rPr>
+              <a:t>2.2 CONFIGURA TRIGGERS, NODOS DE PROCESAMIENTO Y ACCIONES DE SALIDA.</a:t>
+            </a:r>
+          </a:p>
+          <a:p>
+            <a:pPr marL="342900" indent="-342900">
+              <a:spcBef>
+                <a:spcPts val="900"/>
+              </a:spcBef>
+              <a:buClr>
+                <a:srgbClr val="0E7490"/>
+              </a:buClr>
+              <a:buFont typeface="Arial"/>
+              <a:buChar char="•"/>
+            </a:pPr>
+            <a:r>
+              <a:rPr lang="es-CL" sz="1800" dirty="0">
+                <a:solidFill>
+                  <a:srgbClr val="1F2937"/>
+                </a:solidFill>
+              </a:rPr>
+              <a:t>2.3 IMPLEMENTA WORKFLOWS FUNCIONALES CON AL MENOS TRES NODOS CONECTADOS.</a:t>
             </a:r>
           </a:p>
         </p:txBody>
@@ -1289,7 +1765,7 @@
                   <a:srgbClr val="6B7280"/>
                 </a:solidFill>
               </a:rPr>
-              <a:t>PF1821 · Módulo 2 · Cápsula 2 · AE2</a:t>
+              <a:t>PF1821 · Módulo 2 · Cápsula 2 · Aprendizaje esperado 2</a:t>
             </a:r>
           </a:p>
         </p:txBody>
@@ -1343,14 +1819,67 @@
       </p:sp>
       <p:sp>
         <p:nvSpPr>
+          <p:cNvPr id="7" name="Etiqueta"/>
+          <p:cNvSpPr txBox="1"/>
+          <p:nvPr/>
+        </p:nvSpPr>
+        <p:spPr>
+          <a:xfrm>
+            <a:off x="609600" y="228600"/>
+            <a:ext cx="7315200" cy="914400"/>
+          </a:xfrm>
+          <a:prstGeom prst="rect">
+            <a:avLst/>
+          </a:prstGeom>
+          <a:noFill/>
+        </p:spPr>
+        <p:txBody>
+          <a:bodyPr wrap="square" lIns="0" rIns="0" anchor="b">
+            <a:normAutofit/>
+          </a:bodyPr>
+          <a:lstStyle/>
+          <a:p>
+            <a:r>
+              <a:rPr lang="es-CL" sz="1200" b="1" dirty="0">
+                <a:solidFill>
+                  <a:srgbClr val="0E7490"/>
+                </a:solidFill>
+              </a:rPr>
+              <a:t>CONTENIDO DEL PLAN (TEXTUAL)</a:t>
+            </a:r>
+          </a:p>
+          <a:p>
+            <a:r>
+              <a:rPr lang="es-CL" sz="1200" b="1" dirty="0">
+                <a:solidFill>
+                  <a:srgbClr val="0F3D5E"/>
+                </a:solidFill>
+              </a:rPr>
+              <a:t>EDITOR VISUAL: NODOS Y CONEXIONES.</a:t>
+            </a:r>
+          </a:p>
+          <a:p>
+            <a:r>
+              <a:rPr lang="es-CL" sz="1200" b="1" dirty="0">
+                <a:solidFill>
+                  <a:srgbClr val="0F3D5E"/>
+                </a:solidFill>
+              </a:rPr>
+              <a:t>WORKSPACE Y NAVEGACIÓN.</a:t>
+            </a:r>
+          </a:p>
+        </p:txBody>
+      </p:sp>
+      <p:sp>
+        <p:nvSpPr>
           <p:cNvPr id="3" name="Título"/>
           <p:cNvSpPr txBox="1"/>
           <p:nvPr/>
         </p:nvSpPr>
         <p:spPr>
           <a:xfrm>
-            <a:off x="609600" y="381000"/>
-            <a:ext cx="7315200" cy="990600"/>
+            <a:off x="609600" y="1181100"/>
+            <a:ext cx="7315200" cy="685800"/>
           </a:xfrm>
           <a:prstGeom prst="rect">
             <a:avLst/>
@@ -1364,12 +1893,12 @@
           <a:lstStyle/>
           <a:p>
             <a:r>
-              <a:rPr lang="es-CL" sz="3200" b="1" dirty="0">
+              <a:rPr lang="es-CL" sz="2800" b="1" dirty="0">
                 <a:solidFill>
                   <a:srgbClr val="0F3D5E"/>
                 </a:solidFill>
               </a:rPr>
-              <a:t>La estructura base</a:t>
+              <a:t>Editor visual y espacio de trabajo</a:t>
             </a:r>
           </a:p>
         </p:txBody>
@@ -1382,7 +1911,7 @@
         </p:nvSpPr>
         <p:spPr>
           <a:xfrm>
-            <a:off x="609600" y="1447800"/>
+            <a:off x="609600" y="1943100"/>
             <a:ext cx="1066800" cy="50800"/>
           </a:xfrm>
           <a:prstGeom prst="rect">
@@ -1404,8 +1933,8 @@
         </p:nvSpPr>
         <p:spPr>
           <a:xfrm>
-            <a:off x="609600" y="1676400"/>
-            <a:ext cx="7315200" cy="4419600"/>
+            <a:off x="609600" y="2095500"/>
+            <a:ext cx="7315200" cy="4000500"/>
           </a:xfrm>
           <a:prstGeom prst="rect">
             <a:avLst/>
@@ -1429,20 +1958,12 @@
               <a:buChar char="•"/>
             </a:pPr>
             <a:r>
-              <a:rPr lang="es-CL" sz="2400" b="1" dirty="0">
+              <a:rPr lang="es-CL" sz="2000" dirty="0">
                 <a:solidFill>
                   <a:srgbClr val="1F2937"/>
                 </a:solidFill>
               </a:rPr>
-              <a:t>Trigger → procesar → ejecutar</a:t>
-            </a:r>
-            <a:r>
-              <a:rPr lang="es-CL" sz="2400" dirty="0">
-                <a:solidFill>
-                  <a:srgbClr val="1F2937"/>
-                </a:solidFill>
-              </a:rPr>
-              <a:t>: algo inicia el flujo, los datos se preparan, y se hace la acción final.</a:t>
+              <a:t>Nodos que se arrastran y se conectan; cada nodo recibe ítems, hace algo y entrega ítems.</a:t>
             </a:r>
           </a:p>
           <a:p>
@@ -1457,12 +1978,12 @@
               <a:buChar char="•"/>
             </a:pPr>
             <a:r>
-              <a:rPr lang="es-CL" sz="2400" dirty="0">
+              <a:rPr lang="es-CL" sz="2000" dirty="0">
                 <a:solidFill>
                   <a:srgbClr val="1F2937"/>
                 </a:solidFill>
               </a:rPr>
-              <a:t>Con tres nodos ya hay un workflow útil.</a:t>
+              <a:t>Desde la vista general se navega entre workflows, credenciales y ejecuciones, y cada workflow se abre en su propio canvas.</a:t>
             </a:r>
           </a:p>
         </p:txBody>
@@ -1495,7 +2016,7 @@
                   <a:srgbClr val="6B7280"/>
                 </a:solidFill>
               </a:rPr>
-              <a:t>PF1821 · Módulo 2 · Cápsula 2 · AE2</a:t>
+              <a:t>PF1821 · Módulo 2 · Cápsula 2 · Aprendizaje esperado 2</a:t>
             </a:r>
           </a:p>
         </p:txBody>
@@ -1549,14 +2070,67 @@
       </p:sp>
       <p:sp>
         <p:nvSpPr>
+          <p:cNvPr id="7" name="Etiqueta"/>
+          <p:cNvSpPr txBox="1"/>
+          <p:nvPr/>
+        </p:nvSpPr>
+        <p:spPr>
+          <a:xfrm>
+            <a:off x="609600" y="228600"/>
+            <a:ext cx="7315200" cy="914400"/>
+          </a:xfrm>
+          <a:prstGeom prst="rect">
+            <a:avLst/>
+          </a:prstGeom>
+          <a:noFill/>
+        </p:spPr>
+        <p:txBody>
+          <a:bodyPr wrap="square" lIns="0" rIns="0" anchor="b">
+            <a:normAutofit/>
+          </a:bodyPr>
+          <a:lstStyle/>
+          <a:p>
+            <a:r>
+              <a:rPr lang="es-CL" sz="1200" b="1" dirty="0">
+                <a:solidFill>
+                  <a:srgbClr val="0E7490"/>
+                </a:solidFill>
+              </a:rPr>
+              <a:t>CONTENIDO DEL PLAN (TEXTUAL)</a:t>
+            </a:r>
+          </a:p>
+          <a:p>
+            <a:r>
+              <a:rPr lang="es-CL" sz="1200" b="1" dirty="0">
+                <a:solidFill>
+                  <a:srgbClr val="0F3D5E"/>
+                </a:solidFill>
+              </a:rPr>
+              <a:t>PRIMEROS WORKFLOWS.</a:t>
+            </a:r>
+          </a:p>
+          <a:p>
+            <a:r>
+              <a:rPr lang="es-CL" sz="1200" b="1" dirty="0">
+                <a:solidFill>
+                  <a:srgbClr val="0F3D5E"/>
+                </a:solidFill>
+              </a:rPr>
+              <a:t>ESTRUCTURA TRIGGER, PROCESAR Y EJECUTAR.</a:t>
+            </a:r>
+          </a:p>
+        </p:txBody>
+      </p:sp>
+      <p:sp>
+        <p:nvSpPr>
           <p:cNvPr id="3" name="Título"/>
           <p:cNvSpPr txBox="1"/>
           <p:nvPr/>
         </p:nvSpPr>
         <p:spPr>
           <a:xfrm>
-            <a:off x="609600" y="381000"/>
-            <a:ext cx="7315200" cy="990600"/>
+            <a:off x="609600" y="1181100"/>
+            <a:ext cx="7315200" cy="685800"/>
           </a:xfrm>
           <a:prstGeom prst="rect">
             <a:avLst/>
@@ -1570,12 +2144,12 @@
           <a:lstStyle/>
           <a:p>
             <a:r>
-              <a:rPr lang="es-CL" sz="3200" b="1" dirty="0">
+              <a:rPr lang="es-CL" sz="2800" b="1" dirty="0">
                 <a:solidFill>
                   <a:srgbClr val="0F3D5E"/>
                 </a:solidFill>
               </a:rPr>
-              <a:t>Tipos de trigger</a:t>
+              <a:t>La estructura base</a:t>
             </a:r>
           </a:p>
         </p:txBody>
@@ -1588,7 +2162,7 @@
         </p:nvSpPr>
         <p:spPr>
           <a:xfrm>
-            <a:off x="609600" y="1447800"/>
+            <a:off x="609600" y="1943100"/>
             <a:ext cx="1066800" cy="50800"/>
           </a:xfrm>
           <a:prstGeom prst="rect">
@@ -1610,8 +2184,8 @@
         </p:nvSpPr>
         <p:spPr>
           <a:xfrm>
-            <a:off x="609600" y="1676400"/>
-            <a:ext cx="7315200" cy="4419600"/>
+            <a:off x="609600" y="2095500"/>
+            <a:ext cx="7315200" cy="4000500"/>
           </a:xfrm>
           <a:prstGeom prst="rect">
             <a:avLst/>
@@ -1635,12 +2209,40 @@
               <a:buChar char="•"/>
             </a:pPr>
             <a:r>
+              <a:rPr lang="es-CL" sz="2400" b="1" dirty="0">
+                <a:solidFill>
+                  <a:srgbClr val="1F2937"/>
+                </a:solidFill>
+              </a:rPr>
+              <a:t>Trigger → procesar → ejecutar</a:t>
+            </a:r>
+            <a:r>
               <a:rPr lang="es-CL" sz="2400" dirty="0">
                 <a:solidFill>
                   <a:srgbClr val="1F2937"/>
                 </a:solidFill>
               </a:rPr>
-              <a:t>Manual (para probar), formulario de n8n, webhook (otra aplicación avisa), programado (cada viernes 18:00), eventos de aplicaciones.</a:t>
+              <a:t>: algo inicia el flujo, los datos se preparan, y se hace la acción final.</a:t>
+            </a:r>
+          </a:p>
+          <a:p>
+            <a:pPr marL="342900" indent="-342900">
+              <a:spcBef>
+                <a:spcPts val="900"/>
+              </a:spcBef>
+              <a:buClr>
+                <a:srgbClr val="0E7490"/>
+              </a:buClr>
+              <a:buFont typeface="Arial"/>
+              <a:buChar char="•"/>
+            </a:pPr>
+            <a:r>
+              <a:rPr lang="es-CL" sz="2400" dirty="0">
+                <a:solidFill>
+                  <a:srgbClr val="1F2937"/>
+                </a:solidFill>
+              </a:rPr>
+              <a:t>Con tres nodos ya hay un workflow útil.</a:t>
             </a:r>
           </a:p>
         </p:txBody>
@@ -1673,7 +2275,7 @@
                   <a:srgbClr val="6B7280"/>
                 </a:solidFill>
               </a:rPr>
-              <a:t>PF1821 · Módulo 2 · Cápsula 2 · AE2</a:t>
+              <a:t>PF1821 · Módulo 2 · Cápsula 2 · Aprendizaje esperado 2</a:t>
             </a:r>
           </a:p>
         </p:txBody>
@@ -1727,14 +2329,57 @@
       </p:sp>
       <p:sp>
         <p:nvSpPr>
+          <p:cNvPr id="7" name="Etiqueta"/>
+          <p:cNvSpPr txBox="1"/>
+          <p:nvPr/>
+        </p:nvSpPr>
+        <p:spPr>
+          <a:xfrm>
+            <a:off x="609600" y="228600"/>
+            <a:ext cx="7315200" cy="914400"/>
+          </a:xfrm>
+          <a:prstGeom prst="rect">
+            <a:avLst/>
+          </a:prstGeom>
+          <a:noFill/>
+        </p:spPr>
+        <p:txBody>
+          <a:bodyPr wrap="square" lIns="0" rIns="0" anchor="b">
+            <a:normAutofit/>
+          </a:bodyPr>
+          <a:lstStyle/>
+          <a:p>
+            <a:r>
+              <a:rPr lang="es-CL" sz="1200" b="1" dirty="0">
+                <a:solidFill>
+                  <a:srgbClr val="0E7490"/>
+                </a:solidFill>
+              </a:rPr>
+              <a:t>CONTENIDO DEL PLAN (TEXTUAL)</a:t>
+            </a:r>
+          </a:p>
+          <a:p>
+            <a:r>
+              <a:rPr lang="es-CL" sz="1200" b="1" dirty="0">
+                <a:solidFill>
+                  <a:srgbClr val="0F3D5E"/>
+                </a:solidFill>
+              </a:rPr>
+              <a:t>CONFIGURACIÓN DE NODOS BÁSICOS.</a:t>
+            </a:r>
+          </a:p>
+        </p:txBody>
+      </p:sp>
+      <p:sp>
+        <p:nvSpPr>
           <p:cNvPr id="3" name="Título"/>
           <p:cNvSpPr txBox="1"/>
           <p:nvPr/>
         </p:nvSpPr>
         <p:spPr>
           <a:xfrm>
-            <a:off x="609600" y="381000"/>
-            <a:ext cx="7315200" cy="990600"/>
+            <a:off x="609600" y="1181100"/>
+            <a:ext cx="7315200" cy="685800"/>
           </a:xfrm>
           <a:prstGeom prst="rect">
             <a:avLst/>
@@ -1748,12 +2393,12 @@
           <a:lstStyle/>
           <a:p>
             <a:r>
-              <a:rPr lang="es-CL" sz="3200" b="1" dirty="0">
+              <a:rPr lang="es-CL" sz="2800" b="1" dirty="0">
                 <a:solidFill>
                   <a:srgbClr val="0F3D5E"/>
                 </a:solidFill>
               </a:rPr>
-              <a:t>Configurar un nodo</a:t>
+              <a:t>Tipos de trigger</a:t>
             </a:r>
           </a:p>
         </p:txBody>
@@ -1766,7 +2411,7 @@
         </p:nvSpPr>
         <p:spPr>
           <a:xfrm>
-            <a:off x="609600" y="1447800"/>
+            <a:off x="609600" y="1943100"/>
             <a:ext cx="1066800" cy="50800"/>
           </a:xfrm>
           <a:prstGeom prst="rect">
@@ -1788,8 +2433,8 @@
         </p:nvSpPr>
         <p:spPr>
           <a:xfrm>
-            <a:off x="609600" y="1676400"/>
-            <a:ext cx="7315200" cy="4419600"/>
+            <a:off x="609600" y="2095500"/>
+            <a:ext cx="7315200" cy="4000500"/>
           </a:xfrm>
           <a:prstGeom prst="rect">
             <a:avLst/>
@@ -1818,7 +2463,7 @@
                   <a:srgbClr val="1F2937"/>
                 </a:solidFill>
               </a:rPr>
-              <a:t>Parámetros, credencial si la necesita, y Execute step para probarlo solo.</a:t>
+              <a:t>Manual (para probar), formulario de n8n, webhook (otra aplicación avisa), programado (cada viernes 18:00), eventos de aplicaciones.</a:t>
             </a:r>
           </a:p>
         </p:txBody>
@@ -1851,7 +2496,7 @@
                   <a:srgbClr val="6B7280"/>
                 </a:solidFill>
               </a:rPr>
-              <a:t>PF1821 · Módulo 2 · Cápsula 2 · AE2</a:t>
+              <a:t>PF1821 · Módulo 2 · Cápsula 2 · Aprendizaje esperado 2</a:t>
             </a:r>
           </a:p>
         </p:txBody>
@@ -1905,14 +2550,67 @@
       </p:sp>
       <p:sp>
         <p:nvSpPr>
+          <p:cNvPr id="7" name="Etiqueta"/>
+          <p:cNvSpPr txBox="1"/>
+          <p:nvPr/>
+        </p:nvSpPr>
+        <p:spPr>
+          <a:xfrm>
+            <a:off x="609600" y="228600"/>
+            <a:ext cx="7315200" cy="914400"/>
+          </a:xfrm>
+          <a:prstGeom prst="rect">
+            <a:avLst/>
+          </a:prstGeom>
+          <a:noFill/>
+        </p:spPr>
+        <p:txBody>
+          <a:bodyPr wrap="square" lIns="0" rIns="0" anchor="b">
+            <a:normAutofit/>
+          </a:bodyPr>
+          <a:lstStyle/>
+          <a:p>
+            <a:r>
+              <a:rPr lang="es-CL" sz="1200" b="1" dirty="0">
+                <a:solidFill>
+                  <a:srgbClr val="0E7490"/>
+                </a:solidFill>
+              </a:rPr>
+              <a:t>CONTENIDO DEL PLAN (TEXTUAL)</a:t>
+            </a:r>
+          </a:p>
+          <a:p>
+            <a:r>
+              <a:rPr lang="es-CL" sz="1200" b="1" dirty="0">
+                <a:solidFill>
+                  <a:srgbClr val="0F3D5E"/>
+                </a:solidFill>
+              </a:rPr>
+              <a:t>PANEL DE CONFIGURACIÓN.</a:t>
+            </a:r>
+          </a:p>
+          <a:p>
+            <a:r>
+              <a:rPr lang="es-CL" sz="1200" b="1" dirty="0">
+                <a:solidFill>
+                  <a:srgbClr val="0F3D5E"/>
+                </a:solidFill>
+              </a:rPr>
+              <a:t>CONFIGURACIÓN DE NODOS BÁSICOS.</a:t>
+            </a:r>
+          </a:p>
+        </p:txBody>
+      </p:sp>
+      <p:sp>
+        <p:nvSpPr>
           <p:cNvPr id="3" name="Título"/>
           <p:cNvSpPr txBox="1"/>
           <p:nvPr/>
         </p:nvSpPr>
         <p:spPr>
           <a:xfrm>
-            <a:off x="609600" y="381000"/>
-            <a:ext cx="7315200" cy="990600"/>
+            <a:off x="609600" y="1181100"/>
+            <a:ext cx="7315200" cy="685800"/>
           </a:xfrm>
           <a:prstGeom prst="rect">
             <a:avLst/>
@@ -1926,12 +2624,12 @@
           <a:lstStyle/>
           <a:p>
             <a:r>
-              <a:rPr lang="es-CL" sz="3200" b="1" dirty="0">
+              <a:rPr lang="es-CL" sz="2800" b="1" dirty="0">
                 <a:solidFill>
                   <a:srgbClr val="0F3D5E"/>
                 </a:solidFill>
               </a:rPr>
-              <a:t>Mirar los datos</a:t>
+              <a:t>Configurar un nodo</a:t>
             </a:r>
           </a:p>
         </p:txBody>
@@ -1944,7 +2642,7 @@
         </p:nvSpPr>
         <p:spPr>
           <a:xfrm>
-            <a:off x="609600" y="1447800"/>
+            <a:off x="609600" y="1943100"/>
             <a:ext cx="1066800" cy="50800"/>
           </a:xfrm>
           <a:prstGeom prst="rect">
@@ -1966,8 +2664,8 @@
         </p:nvSpPr>
         <p:spPr>
           <a:xfrm>
-            <a:off x="609600" y="1676400"/>
-            <a:ext cx="7315200" cy="4419600"/>
+            <a:off x="609600" y="2095500"/>
+            <a:ext cx="7315200" cy="4000500"/>
           </a:xfrm>
           <a:prstGeom prst="rect">
             <a:avLst/>
@@ -1996,27 +2694,7 @@
                   <a:srgbClr val="1F2937"/>
                 </a:solidFill>
               </a:rPr>
-              <a:t>Panel de entrada y de salida en vista tabla, JSON o esquema.</a:t>
-            </a:r>
-          </a:p>
-          <a:p>
-            <a:pPr marL="342900" indent="-342900">
-              <a:spcBef>
-                <a:spcPts val="900"/>
-              </a:spcBef>
-              <a:buClr>
-                <a:srgbClr val="0E7490"/>
-              </a:buClr>
-              <a:buFont typeface="Arial"/>
-              <a:buChar char="•"/>
-            </a:pPr>
-            <a:r>
-              <a:rPr lang="es-CL" sz="2400" dirty="0">
-                <a:solidFill>
-                  <a:srgbClr val="1F2937"/>
-                </a:solidFill>
-              </a:rPr>
-              <a:t>Si no lo viste en la salida, no pasó.</a:t>
+              <a:t>Parámetros, credencial si la necesita, y Execute step para probarlo solo.</a:t>
             </a:r>
           </a:p>
         </p:txBody>
@@ -2049,7 +2727,7 @@
                   <a:srgbClr val="6B7280"/>
                 </a:solidFill>
               </a:rPr>
-              <a:t>PF1821 · Módulo 2 · Cápsula 2 · AE2</a:t>
+              <a:t>PF1821 · Módulo 2 · Cápsula 2 · Aprendizaje esperado 2</a:t>
             </a:r>
           </a:p>
         </p:txBody>
@@ -2103,14 +2781,57 @@
       </p:sp>
       <p:sp>
         <p:nvSpPr>
+          <p:cNvPr id="7" name="Etiqueta"/>
+          <p:cNvSpPr txBox="1"/>
+          <p:nvPr/>
+        </p:nvSpPr>
+        <p:spPr>
+          <a:xfrm>
+            <a:off x="609600" y="228600"/>
+            <a:ext cx="7315200" cy="914400"/>
+          </a:xfrm>
+          <a:prstGeom prst="rect">
+            <a:avLst/>
+          </a:prstGeom>
+          <a:noFill/>
+        </p:spPr>
+        <p:txBody>
+          <a:bodyPr wrap="square" lIns="0" rIns="0" anchor="b">
+            <a:normAutofit/>
+          </a:bodyPr>
+          <a:lstStyle/>
+          <a:p>
+            <a:r>
+              <a:rPr lang="es-CL" sz="1200" b="1" dirty="0">
+                <a:solidFill>
+                  <a:srgbClr val="0E7490"/>
+                </a:solidFill>
+              </a:rPr>
+              <a:t>CONTENIDO DEL PLAN (TEXTUAL)</a:t>
+            </a:r>
+          </a:p>
+          <a:p>
+            <a:r>
+              <a:rPr lang="es-CL" sz="1200" b="1" dirty="0">
+                <a:solidFill>
+                  <a:srgbClr val="0F3D5E"/>
+                </a:solidFill>
+              </a:rPr>
+              <a:t>PANEL DE CONFIGURACIÓN.</a:t>
+            </a:r>
+          </a:p>
+        </p:txBody>
+      </p:sp>
+      <p:sp>
+        <p:nvSpPr>
           <p:cNvPr id="3" name="Título"/>
           <p:cNvSpPr txBox="1"/>
           <p:nvPr/>
         </p:nvSpPr>
         <p:spPr>
           <a:xfrm>
-            <a:off x="609600" y="381000"/>
-            <a:ext cx="7315200" cy="990600"/>
+            <a:off x="609600" y="1181100"/>
+            <a:ext cx="7315200" cy="685800"/>
           </a:xfrm>
           <a:prstGeom prst="rect">
             <a:avLst/>
@@ -2124,12 +2845,12 @@
           <a:lstStyle/>
           <a:p>
             <a:r>
-              <a:rPr lang="es-CL" sz="3200" b="1" dirty="0">
+              <a:rPr lang="es-CL" sz="2800" b="1" dirty="0">
                 <a:solidFill>
                   <a:srgbClr val="0F3D5E"/>
                 </a:solidFill>
               </a:rPr>
-              <a:t>Probar sin repetir</a:t>
+              <a:t>Mirar los datos</a:t>
             </a:r>
           </a:p>
         </p:txBody>
@@ -2142,7 +2863,7 @@
         </p:nvSpPr>
         <p:spPr>
           <a:xfrm>
-            <a:off x="609600" y="1447800"/>
+            <a:off x="609600" y="1943100"/>
             <a:ext cx="1066800" cy="50800"/>
           </a:xfrm>
           <a:prstGeom prst="rect">
@@ -2164,8 +2885,8 @@
         </p:nvSpPr>
         <p:spPr>
           <a:xfrm>
-            <a:off x="609600" y="1676400"/>
-            <a:ext cx="7315200" cy="4419600"/>
+            <a:off x="609600" y="2095500"/>
+            <a:ext cx="7315200" cy="4000500"/>
           </a:xfrm>
           <a:prstGeom prst="rect">
             <a:avLst/>
@@ -2194,7 +2915,27 @@
                   <a:srgbClr val="1F2937"/>
                 </a:solidFill>
               </a:rPr>
-              <a:t>Pin data: fijar los datos de una ejecución para seguir construyendo sin volver a disparar el trigger.</a:t>
+              <a:t>Panel de entrada y de salida en vista tabla, JSON o esquema.</a:t>
+            </a:r>
+          </a:p>
+          <a:p>
+            <a:pPr marL="342900" indent="-342900">
+              <a:spcBef>
+                <a:spcPts val="900"/>
+              </a:spcBef>
+              <a:buClr>
+                <a:srgbClr val="0E7490"/>
+              </a:buClr>
+              <a:buFont typeface="Arial"/>
+              <a:buChar char="•"/>
+            </a:pPr>
+            <a:r>
+              <a:rPr lang="es-CL" sz="2400" dirty="0">
+                <a:solidFill>
+                  <a:srgbClr val="1F2937"/>
+                </a:solidFill>
+              </a:rPr>
+              <a:t>Si no lo viste en la salida, no pasó.</a:t>
             </a:r>
           </a:p>
         </p:txBody>
@@ -2227,7 +2968,7 @@
                   <a:srgbClr val="6B7280"/>
                 </a:solidFill>
               </a:rPr>
-              <a:t>PF1821 · Módulo 2 · Cápsula 2 · AE2</a:t>
+              <a:t>PF1821 · Módulo 2 · Cápsula 2 · Aprendizaje esperado 2</a:t>
             </a:r>
           </a:p>
         </p:txBody>
@@ -2281,14 +3022,57 @@
       </p:sp>
       <p:sp>
         <p:nvSpPr>
+          <p:cNvPr id="7" name="Etiqueta"/>
+          <p:cNvSpPr txBox="1"/>
+          <p:nvPr/>
+        </p:nvSpPr>
+        <p:spPr>
+          <a:xfrm>
+            <a:off x="609600" y="228600"/>
+            <a:ext cx="7315200" cy="914400"/>
+          </a:xfrm>
+          <a:prstGeom prst="rect">
+            <a:avLst/>
+          </a:prstGeom>
+          <a:noFill/>
+        </p:spPr>
+        <p:txBody>
+          <a:bodyPr wrap="square" lIns="0" rIns="0" anchor="b">
+            <a:normAutofit/>
+          </a:bodyPr>
+          <a:lstStyle/>
+          <a:p>
+            <a:r>
+              <a:rPr lang="es-CL" sz="1200" b="1" dirty="0">
+                <a:solidFill>
+                  <a:srgbClr val="0E7490"/>
+                </a:solidFill>
+              </a:rPr>
+              <a:t>CONTENIDO DEL PLAN (TEXTUAL)</a:t>
+            </a:r>
+          </a:p>
+          <a:p>
+            <a:r>
+              <a:rPr lang="es-CL" sz="1200" b="1" dirty="0">
+                <a:solidFill>
+                  <a:srgbClr val="0F3D5E"/>
+                </a:solidFill>
+              </a:rPr>
+              <a:t>TESTING Y DEBUGGING INICIAL.</a:t>
+            </a:r>
+          </a:p>
+        </p:txBody>
+      </p:sp>
+      <p:sp>
+        <p:nvSpPr>
           <p:cNvPr id="3" name="Título"/>
           <p:cNvSpPr txBox="1"/>
           <p:nvPr/>
         </p:nvSpPr>
         <p:spPr>
           <a:xfrm>
-            <a:off x="609600" y="381000"/>
-            <a:ext cx="7315200" cy="990600"/>
+            <a:off x="609600" y="1181100"/>
+            <a:ext cx="7315200" cy="685800"/>
           </a:xfrm>
           <a:prstGeom prst="rect">
             <a:avLst/>
@@ -2302,12 +3086,12 @@
           <a:lstStyle/>
           <a:p>
             <a:r>
-              <a:rPr lang="es-CL" sz="3200" b="1" dirty="0">
+              <a:rPr lang="es-CL" sz="2800" b="1" dirty="0">
                 <a:solidFill>
                   <a:srgbClr val="0F3D5E"/>
                 </a:solidFill>
               </a:rPr>
-              <a:t>Prueba y producción</a:t>
+              <a:t>Probar sin repetir</a:t>
             </a:r>
           </a:p>
         </p:txBody>
@@ -2320,7 +3104,7 @@
         </p:nvSpPr>
         <p:spPr>
           <a:xfrm>
-            <a:off x="609600" y="1447800"/>
+            <a:off x="609600" y="1943100"/>
             <a:ext cx="1066800" cy="50800"/>
           </a:xfrm>
           <a:prstGeom prst="rect">
@@ -2342,8 +3126,8 @@
         </p:nvSpPr>
         <p:spPr>
           <a:xfrm>
-            <a:off x="609600" y="1676400"/>
-            <a:ext cx="7315200" cy="4419600"/>
+            <a:off x="609600" y="2095500"/>
+            <a:ext cx="7315200" cy="4000500"/>
           </a:xfrm>
           <a:prstGeom prst="rect">
             <a:avLst/>
@@ -2372,27 +3156,7 @@
                   <a:srgbClr val="1F2937"/>
                 </a:solidFill>
               </a:rPr>
-              <a:t>URL de prueba (con Test workflow) y URL de producción (con el workflow activo).</a:t>
-            </a:r>
-          </a:p>
-          <a:p>
-            <a:pPr marL="342900" indent="-342900">
-              <a:spcBef>
-                <a:spcPts val="900"/>
-              </a:spcBef>
-              <a:buClr>
-                <a:srgbClr val="0E7490"/>
-              </a:buClr>
-              <a:buFont typeface="Arial"/>
-              <a:buChar char="•"/>
-            </a:pPr>
-            <a:r>
-              <a:rPr lang="es-CL" sz="2400" dirty="0">
-                <a:solidFill>
-                  <a:srgbClr val="1F2937"/>
-                </a:solidFill>
-              </a:rPr>
-              <a:t>Activar es lo que lo deja corriendo solo.</a:t>
+              <a:t>Pin data: fijar los datos de una ejecución para seguir construyendo sin volver a disparar el trigger.</a:t>
             </a:r>
           </a:p>
         </p:txBody>
@@ -2425,7 +3189,7 @@
                   <a:srgbClr val="6B7280"/>
                 </a:solidFill>
               </a:rPr>
-              <a:t>PF1821 · Módulo 2 · Cápsula 2 · AE2</a:t>
+              <a:t>PF1821 · Módulo 2 · Cápsula 2 · Aprendizaje esperado 2</a:t>
             </a:r>
           </a:p>
         </p:txBody>
@@ -2479,14 +3243,57 @@
       </p:sp>
       <p:sp>
         <p:nvSpPr>
+          <p:cNvPr id="7" name="Etiqueta"/>
+          <p:cNvSpPr txBox="1"/>
+          <p:nvPr/>
+        </p:nvSpPr>
+        <p:spPr>
+          <a:xfrm>
+            <a:off x="609600" y="228600"/>
+            <a:ext cx="7315200" cy="914400"/>
+          </a:xfrm>
+          <a:prstGeom prst="rect">
+            <a:avLst/>
+          </a:prstGeom>
+          <a:noFill/>
+        </p:spPr>
+        <p:txBody>
+          <a:bodyPr wrap="square" lIns="0" rIns="0" anchor="b">
+            <a:normAutofit/>
+          </a:bodyPr>
+          <a:lstStyle/>
+          <a:p>
+            <a:r>
+              <a:rPr lang="es-CL" sz="1200" b="1" dirty="0">
+                <a:solidFill>
+                  <a:srgbClr val="0E7490"/>
+                </a:solidFill>
+              </a:rPr>
+              <a:t>CONTENIDO DEL PLAN (TEXTUAL)</a:t>
+            </a:r>
+          </a:p>
+          <a:p>
+            <a:r>
+              <a:rPr lang="es-CL" sz="1200" b="1" dirty="0">
+                <a:solidFill>
+                  <a:srgbClr val="0F3D5E"/>
+                </a:solidFill>
+              </a:rPr>
+              <a:t>TESTING Y DEBUGGING INICIAL.</a:t>
+            </a:r>
+          </a:p>
+        </p:txBody>
+      </p:sp>
+      <p:sp>
+        <p:nvSpPr>
           <p:cNvPr id="3" name="Título"/>
           <p:cNvSpPr txBox="1"/>
           <p:nvPr/>
         </p:nvSpPr>
         <p:spPr>
           <a:xfrm>
-            <a:off x="609600" y="381000"/>
-            <a:ext cx="7315200" cy="990600"/>
+            <a:off x="609600" y="1181100"/>
+            <a:ext cx="7315200" cy="685800"/>
           </a:xfrm>
           <a:prstGeom prst="rect">
             <a:avLst/>
@@ -2500,12 +3307,12 @@
           <a:lstStyle/>
           <a:p>
             <a:r>
-              <a:rPr lang="es-CL" sz="3200" b="1" dirty="0">
+              <a:rPr lang="es-CL" sz="2800" b="1" dirty="0">
                 <a:solidFill>
                   <a:srgbClr val="0F3D5E"/>
                 </a:solidFill>
               </a:rPr>
-              <a:t>Primeros errores</a:t>
+              <a:t>Prueba y producción</a:t>
             </a:r>
           </a:p>
         </p:txBody>
@@ -2518,7 +3325,7 @@
         </p:nvSpPr>
         <p:spPr>
           <a:xfrm>
-            <a:off x="609600" y="1447800"/>
+            <a:off x="609600" y="1943100"/>
             <a:ext cx="1066800" cy="50800"/>
           </a:xfrm>
           <a:prstGeom prst="rect">
@@ -2540,8 +3347,8 @@
         </p:nvSpPr>
         <p:spPr>
           <a:xfrm>
-            <a:off x="609600" y="1676400"/>
-            <a:ext cx="7315200" cy="4419600"/>
+            <a:off x="609600" y="2095500"/>
+            <a:ext cx="7315200" cy="4000500"/>
           </a:xfrm>
           <a:prstGeom prst="rect">
             <a:avLst/>
@@ -2570,7 +3377,27 @@
                   <a:srgbClr val="1F2937"/>
                 </a:solidFill>
               </a:rPr>
-              <a:t>Nodo en rojo = leer el mensaje; nodo sin salida = revisar la entrada.</a:t>
+              <a:t>URL de prueba (con Test workflow) y URL de producción (con el workflow activo).</a:t>
+            </a:r>
+          </a:p>
+          <a:p>
+            <a:pPr marL="342900" indent="-342900">
+              <a:spcBef>
+                <a:spcPts val="900"/>
+              </a:spcBef>
+              <a:buClr>
+                <a:srgbClr val="0E7490"/>
+              </a:buClr>
+              <a:buFont typeface="Arial"/>
+              <a:buChar char="•"/>
+            </a:pPr>
+            <a:r>
+              <a:rPr lang="es-CL" sz="2400" dirty="0">
+                <a:solidFill>
+                  <a:srgbClr val="1F2937"/>
+                </a:solidFill>
+              </a:rPr>
+              <a:t>Activar es lo que lo deja corriendo solo.</a:t>
             </a:r>
           </a:p>
         </p:txBody>
@@ -2603,7 +3430,7 @@
                   <a:srgbClr val="6B7280"/>
                 </a:solidFill>
               </a:rPr>
-              <a:t>PF1821 · Módulo 2 · Cápsula 2 · AE2</a:t>
+              <a:t>PF1821 · Módulo 2 · Cápsula 2 · Aprendizaje esperado 2</a:t>
             </a:r>
           </a:p>
         </p:txBody>
